--- a/Segment Anything Model.pptx
+++ b/Segment Anything Model.pptx
@@ -3499,7 +3499,7 @@
           <a:p>
             <a:r>
               <a:rPr lang="zh-CN" altLang="en-US"/>
-              <a:t>陈潆潆周报</a:t>
+              <a:t>周报</a:t>
             </a:r>
             <a:endParaRPr lang="zh-CN" altLang="en-US"/>
           </a:p>
